--- a/Heatmap Baltic Sea/Eco Risk Heatmap/empty ecorisk maps/maps ensamble_V3.pptx
+++ b/Heatmap Baltic Sea/Eco Risk Heatmap/empty ecorisk maps/maps ensamble_V3.pptx
@@ -8772,8 +8772,8 @@
         </p:nvSpPr>
         <p:spPr>
           <a:xfrm>
-            <a:off x="5225747" y="4553304"/>
-            <a:ext cx="3603703" cy="954107"/>
+            <a:off x="4848993" y="4539197"/>
+            <a:ext cx="4225902" cy="1338828"/>
           </a:xfrm>
           <a:prstGeom prst="rect">
             <a:avLst/>
@@ -8889,8 +8889,147 @@
                 <a:ea typeface="MS Shell Dlg 2" panose="020B0604030504040204" pitchFamily="34" charset="0"/>
                 <a:cs typeface="MS Shell Dlg 2" panose="020B0604030504040204" pitchFamily="34" charset="0"/>
               </a:rPr>
-              <a:t>-</a:t>
-            </a:r>
+              <a:t>–</a:t>
+            </a:r>
+          </a:p>
+          <a:p>
+            <a:pPr algn="ctr"/>
+            <a:r>
+              <a:rPr lang="it-IT" sz="700" i="1" dirty="0" err="1">
+                <a:latin typeface="MS Shell Dlg 2" panose="020B0604030504040204" pitchFamily="34" charset="0"/>
+                <a:ea typeface="MS Shell Dlg 2" panose="020B0604030504040204" pitchFamily="34" charset="0"/>
+                <a:cs typeface="MS Shell Dlg 2" panose="020B0604030504040204" pitchFamily="34" charset="0"/>
+              </a:rPr>
+              <a:t>Gadus</a:t>
+            </a:r>
+            <a:r>
+              <a:rPr lang="it-IT" sz="700" i="1" dirty="0">
+                <a:latin typeface="MS Shell Dlg 2" panose="020B0604030504040204" pitchFamily="34" charset="0"/>
+                <a:ea typeface="MS Shell Dlg 2" panose="020B0604030504040204" pitchFamily="34" charset="0"/>
+                <a:cs typeface="MS Shell Dlg 2" panose="020B0604030504040204" pitchFamily="34" charset="0"/>
+              </a:rPr>
+              <a:t> </a:t>
+            </a:r>
+            <a:r>
+              <a:rPr lang="it-IT" sz="700" i="1" dirty="0" err="1">
+                <a:latin typeface="MS Shell Dlg 2" panose="020B0604030504040204" pitchFamily="34" charset="0"/>
+                <a:ea typeface="MS Shell Dlg 2" panose="020B0604030504040204" pitchFamily="34" charset="0"/>
+                <a:cs typeface="MS Shell Dlg 2" panose="020B0604030504040204" pitchFamily="34" charset="0"/>
+              </a:rPr>
+              <a:t>morhua</a:t>
+            </a:r>
+            <a:r>
+              <a:rPr lang="it-IT" sz="700" i="1" dirty="0">
+                <a:latin typeface="MS Shell Dlg 2" panose="020B0604030504040204" pitchFamily="34" charset="0"/>
+                <a:ea typeface="MS Shell Dlg 2" panose="020B0604030504040204" pitchFamily="34" charset="0"/>
+                <a:cs typeface="MS Shell Dlg 2" panose="020B0604030504040204" pitchFamily="34" charset="0"/>
+              </a:rPr>
+              <a:t>, Limanda </a:t>
+            </a:r>
+            <a:r>
+              <a:rPr lang="it-IT" sz="700" i="1" dirty="0" err="1">
+                <a:latin typeface="MS Shell Dlg 2" panose="020B0604030504040204" pitchFamily="34" charset="0"/>
+                <a:ea typeface="MS Shell Dlg 2" panose="020B0604030504040204" pitchFamily="34" charset="0"/>
+                <a:cs typeface="MS Shell Dlg 2" panose="020B0604030504040204" pitchFamily="34" charset="0"/>
+              </a:rPr>
+              <a:t>limanda</a:t>
+            </a:r>
+            <a:r>
+              <a:rPr lang="it-IT" sz="700" i="1" dirty="0">
+                <a:latin typeface="MS Shell Dlg 2" panose="020B0604030504040204" pitchFamily="34" charset="0"/>
+                <a:ea typeface="MS Shell Dlg 2" panose="020B0604030504040204" pitchFamily="34" charset="0"/>
+                <a:cs typeface="MS Shell Dlg 2" panose="020B0604030504040204" pitchFamily="34" charset="0"/>
+              </a:rPr>
+              <a:t>, </a:t>
+            </a:r>
+            <a:r>
+              <a:rPr lang="it-IT" sz="700" i="1" dirty="0" err="1">
+                <a:latin typeface="MS Shell Dlg 2" panose="020B0604030504040204" pitchFamily="34" charset="0"/>
+                <a:ea typeface="MS Shell Dlg 2" panose="020B0604030504040204" pitchFamily="34" charset="0"/>
+                <a:cs typeface="MS Shell Dlg 2" panose="020B0604030504040204" pitchFamily="34" charset="0"/>
+              </a:rPr>
+              <a:t>Merlangius</a:t>
+            </a:r>
+            <a:r>
+              <a:rPr lang="it-IT" sz="700" i="1" dirty="0">
+                <a:latin typeface="MS Shell Dlg 2" panose="020B0604030504040204" pitchFamily="34" charset="0"/>
+                <a:ea typeface="MS Shell Dlg 2" panose="020B0604030504040204" pitchFamily="34" charset="0"/>
+                <a:cs typeface="MS Shell Dlg 2" panose="020B0604030504040204" pitchFamily="34" charset="0"/>
+              </a:rPr>
+              <a:t> </a:t>
+            </a:r>
+            <a:r>
+              <a:rPr lang="it-IT" sz="700" i="1" dirty="0" err="1">
+                <a:latin typeface="MS Shell Dlg 2" panose="020B0604030504040204" pitchFamily="34" charset="0"/>
+                <a:ea typeface="MS Shell Dlg 2" panose="020B0604030504040204" pitchFamily="34" charset="0"/>
+                <a:cs typeface="MS Shell Dlg 2" panose="020B0604030504040204" pitchFamily="34" charset="0"/>
+              </a:rPr>
+              <a:t>merlangus</a:t>
+            </a:r>
+            <a:r>
+              <a:rPr lang="it-IT" sz="700" i="1" dirty="0">
+                <a:latin typeface="MS Shell Dlg 2" panose="020B0604030504040204" pitchFamily="34" charset="0"/>
+                <a:ea typeface="MS Shell Dlg 2" panose="020B0604030504040204" pitchFamily="34" charset="0"/>
+                <a:cs typeface="MS Shell Dlg 2" panose="020B0604030504040204" pitchFamily="34" charset="0"/>
+              </a:rPr>
+              <a:t>, </a:t>
+            </a:r>
+            <a:r>
+              <a:rPr lang="it-IT" sz="700" i="1" dirty="0" err="1">
+                <a:latin typeface="MS Shell Dlg 2" panose="020B0604030504040204" pitchFamily="34" charset="0"/>
+                <a:ea typeface="MS Shell Dlg 2" panose="020B0604030504040204" pitchFamily="34" charset="0"/>
+                <a:cs typeface="MS Shell Dlg 2" panose="020B0604030504040204" pitchFamily="34" charset="0"/>
+              </a:rPr>
+              <a:t>Platichthys</a:t>
+            </a:r>
+            <a:r>
+              <a:rPr lang="it-IT" sz="700" i="1" dirty="0">
+                <a:latin typeface="MS Shell Dlg 2" panose="020B0604030504040204" pitchFamily="34" charset="0"/>
+                <a:ea typeface="MS Shell Dlg 2" panose="020B0604030504040204" pitchFamily="34" charset="0"/>
+                <a:cs typeface="MS Shell Dlg 2" panose="020B0604030504040204" pitchFamily="34" charset="0"/>
+              </a:rPr>
+              <a:t> </a:t>
+            </a:r>
+            <a:r>
+              <a:rPr lang="it-IT" sz="700" i="1" dirty="0" err="1">
+                <a:latin typeface="MS Shell Dlg 2" panose="020B0604030504040204" pitchFamily="34" charset="0"/>
+                <a:ea typeface="MS Shell Dlg 2" panose="020B0604030504040204" pitchFamily="34" charset="0"/>
+                <a:cs typeface="MS Shell Dlg 2" panose="020B0604030504040204" pitchFamily="34" charset="0"/>
+              </a:rPr>
+              <a:t>flesus</a:t>
+            </a:r>
+            <a:r>
+              <a:rPr lang="it-IT" sz="700" i="1" dirty="0">
+                <a:latin typeface="MS Shell Dlg 2" panose="020B0604030504040204" pitchFamily="34" charset="0"/>
+                <a:ea typeface="MS Shell Dlg 2" panose="020B0604030504040204" pitchFamily="34" charset="0"/>
+                <a:cs typeface="MS Shell Dlg 2" panose="020B0604030504040204" pitchFamily="34" charset="0"/>
+              </a:rPr>
+              <a:t>, </a:t>
+            </a:r>
+            <a:r>
+              <a:rPr lang="it-IT" sz="700" i="1" dirty="0" err="1">
+                <a:latin typeface="MS Shell Dlg 2" panose="020B0604030504040204" pitchFamily="34" charset="0"/>
+                <a:ea typeface="MS Shell Dlg 2" panose="020B0604030504040204" pitchFamily="34" charset="0"/>
+                <a:cs typeface="MS Shell Dlg 2" panose="020B0604030504040204" pitchFamily="34" charset="0"/>
+              </a:rPr>
+              <a:t>Pleuronectes</a:t>
+            </a:r>
+            <a:r>
+              <a:rPr lang="it-IT" sz="700" i="1" dirty="0">
+                <a:latin typeface="MS Shell Dlg 2" panose="020B0604030504040204" pitchFamily="34" charset="0"/>
+                <a:ea typeface="MS Shell Dlg 2" panose="020B0604030504040204" pitchFamily="34" charset="0"/>
+                <a:cs typeface="MS Shell Dlg 2" panose="020B0604030504040204" pitchFamily="34" charset="0"/>
+              </a:rPr>
+              <a:t> platessa</a:t>
+            </a:r>
+          </a:p>
+          <a:p>
+            <a:pPr algn="ctr"/>
+            <a:endParaRPr lang="it-IT" dirty="0">
+              <a:latin typeface="MS Shell Dlg 2" panose="020B0604030504040204" pitchFamily="34" charset="0"/>
+              <a:ea typeface="MS Shell Dlg 2" panose="020B0604030504040204" pitchFamily="34" charset="0"/>
+              <a:cs typeface="MS Shell Dlg 2" panose="020B0604030504040204" pitchFamily="34" charset="0"/>
+            </a:endParaRPr>
           </a:p>
         </p:txBody>
       </p:sp>
@@ -10460,7 +10599,7 @@
         <p:spPr>
           <a:xfrm>
             <a:off x="4228736" y="4641095"/>
-            <a:ext cx="5429784" cy="954107"/>
+            <a:ext cx="5429784" cy="1077218"/>
           </a:xfrm>
           <a:prstGeom prst="rect">
             <a:avLst/>
@@ -10592,7 +10731,138 @@
                 <a:ea typeface="MS Shell Dlg 2" panose="020B0604030504040204" pitchFamily="34" charset="0"/>
                 <a:cs typeface="MS Shell Dlg 2" panose="020B0604030504040204" pitchFamily="34" charset="0"/>
               </a:rPr>
-              <a:t>-</a:t>
+              <a:t>–</a:t>
+            </a:r>
+          </a:p>
+          <a:p>
+            <a:pPr algn="ctr"/>
+            <a:r>
+              <a:rPr lang="it-IT" sz="800" i="1" dirty="0" err="1">
+                <a:latin typeface="MS Shell Dlg 2" panose="020B0604030504040204" pitchFamily="34" charset="0"/>
+                <a:ea typeface="MS Shell Dlg 2" panose="020B0604030504040204" pitchFamily="34" charset="0"/>
+                <a:cs typeface="MS Shell Dlg 2" panose="020B0604030504040204" pitchFamily="34" charset="0"/>
+              </a:rPr>
+              <a:t>Gadus</a:t>
+            </a:r>
+            <a:r>
+              <a:rPr lang="it-IT" sz="800" i="1" dirty="0">
+                <a:latin typeface="MS Shell Dlg 2" panose="020B0604030504040204" pitchFamily="34" charset="0"/>
+                <a:ea typeface="MS Shell Dlg 2" panose="020B0604030504040204" pitchFamily="34" charset="0"/>
+                <a:cs typeface="MS Shell Dlg 2" panose="020B0604030504040204" pitchFamily="34" charset="0"/>
+              </a:rPr>
+              <a:t> </a:t>
+            </a:r>
+            <a:r>
+              <a:rPr lang="it-IT" sz="800" i="1" dirty="0" err="1">
+                <a:latin typeface="MS Shell Dlg 2" panose="020B0604030504040204" pitchFamily="34" charset="0"/>
+                <a:ea typeface="MS Shell Dlg 2" panose="020B0604030504040204" pitchFamily="34" charset="0"/>
+                <a:cs typeface="MS Shell Dlg 2" panose="020B0604030504040204" pitchFamily="34" charset="0"/>
+              </a:rPr>
+              <a:t>morhua</a:t>
+            </a:r>
+            <a:r>
+              <a:rPr lang="it-IT" sz="800" i="1" dirty="0">
+                <a:latin typeface="MS Shell Dlg 2" panose="020B0604030504040204" pitchFamily="34" charset="0"/>
+                <a:ea typeface="MS Shell Dlg 2" panose="020B0604030504040204" pitchFamily="34" charset="0"/>
+                <a:cs typeface="MS Shell Dlg 2" panose="020B0604030504040204" pitchFamily="34" charset="0"/>
+              </a:rPr>
+              <a:t>, Limanda </a:t>
+            </a:r>
+            <a:r>
+              <a:rPr lang="it-IT" sz="800" i="1" dirty="0" err="1">
+                <a:latin typeface="MS Shell Dlg 2" panose="020B0604030504040204" pitchFamily="34" charset="0"/>
+                <a:ea typeface="MS Shell Dlg 2" panose="020B0604030504040204" pitchFamily="34" charset="0"/>
+                <a:cs typeface="MS Shell Dlg 2" panose="020B0604030504040204" pitchFamily="34" charset="0"/>
+              </a:rPr>
+              <a:t>limanda</a:t>
+            </a:r>
+            <a:r>
+              <a:rPr lang="it-IT" sz="800" i="1" dirty="0">
+                <a:latin typeface="MS Shell Dlg 2" panose="020B0604030504040204" pitchFamily="34" charset="0"/>
+                <a:ea typeface="MS Shell Dlg 2" panose="020B0604030504040204" pitchFamily="34" charset="0"/>
+                <a:cs typeface="MS Shell Dlg 2" panose="020B0604030504040204" pitchFamily="34" charset="0"/>
+              </a:rPr>
+              <a:t>, </a:t>
+            </a:r>
+            <a:r>
+              <a:rPr lang="it-IT" sz="800" i="1" dirty="0" err="1">
+                <a:latin typeface="MS Shell Dlg 2" panose="020B0604030504040204" pitchFamily="34" charset="0"/>
+                <a:ea typeface="MS Shell Dlg 2" panose="020B0604030504040204" pitchFamily="34" charset="0"/>
+                <a:cs typeface="MS Shell Dlg 2" panose="020B0604030504040204" pitchFamily="34" charset="0"/>
+              </a:rPr>
+              <a:t>Merlangius</a:t>
+            </a:r>
+            <a:r>
+              <a:rPr lang="it-IT" sz="800" i="1" dirty="0">
+                <a:latin typeface="MS Shell Dlg 2" panose="020B0604030504040204" pitchFamily="34" charset="0"/>
+                <a:ea typeface="MS Shell Dlg 2" panose="020B0604030504040204" pitchFamily="34" charset="0"/>
+                <a:cs typeface="MS Shell Dlg 2" panose="020B0604030504040204" pitchFamily="34" charset="0"/>
+              </a:rPr>
+              <a:t> </a:t>
+            </a:r>
+            <a:r>
+              <a:rPr lang="it-IT" sz="800" i="1" dirty="0" err="1">
+                <a:latin typeface="MS Shell Dlg 2" panose="020B0604030504040204" pitchFamily="34" charset="0"/>
+                <a:ea typeface="MS Shell Dlg 2" panose="020B0604030504040204" pitchFamily="34" charset="0"/>
+                <a:cs typeface="MS Shell Dlg 2" panose="020B0604030504040204" pitchFamily="34" charset="0"/>
+              </a:rPr>
+              <a:t>merlangus</a:t>
+            </a:r>
+            <a:r>
+              <a:rPr lang="it-IT" sz="800" i="1" dirty="0">
+                <a:latin typeface="MS Shell Dlg 2" panose="020B0604030504040204" pitchFamily="34" charset="0"/>
+                <a:ea typeface="MS Shell Dlg 2" panose="020B0604030504040204" pitchFamily="34" charset="0"/>
+                <a:cs typeface="MS Shell Dlg 2" panose="020B0604030504040204" pitchFamily="34" charset="0"/>
+              </a:rPr>
+              <a:t>, </a:t>
+            </a:r>
+            <a:r>
+              <a:rPr lang="it-IT" sz="800" i="1" dirty="0" err="1">
+                <a:latin typeface="MS Shell Dlg 2" panose="020B0604030504040204" pitchFamily="34" charset="0"/>
+                <a:ea typeface="MS Shell Dlg 2" panose="020B0604030504040204" pitchFamily="34" charset="0"/>
+                <a:cs typeface="MS Shell Dlg 2" panose="020B0604030504040204" pitchFamily="34" charset="0"/>
+              </a:rPr>
+              <a:t>Platichthys</a:t>
+            </a:r>
+            <a:r>
+              <a:rPr lang="it-IT" sz="800" i="1" dirty="0">
+                <a:latin typeface="MS Shell Dlg 2" panose="020B0604030504040204" pitchFamily="34" charset="0"/>
+                <a:ea typeface="MS Shell Dlg 2" panose="020B0604030504040204" pitchFamily="34" charset="0"/>
+                <a:cs typeface="MS Shell Dlg 2" panose="020B0604030504040204" pitchFamily="34" charset="0"/>
+              </a:rPr>
+              <a:t> </a:t>
+            </a:r>
+            <a:r>
+              <a:rPr lang="it-IT" sz="800" i="1" dirty="0" err="1">
+                <a:latin typeface="MS Shell Dlg 2" panose="020B0604030504040204" pitchFamily="34" charset="0"/>
+                <a:ea typeface="MS Shell Dlg 2" panose="020B0604030504040204" pitchFamily="34" charset="0"/>
+                <a:cs typeface="MS Shell Dlg 2" panose="020B0604030504040204" pitchFamily="34" charset="0"/>
+              </a:rPr>
+              <a:t>flesus</a:t>
+            </a:r>
+            <a:r>
+              <a:rPr lang="it-IT" sz="800" i="1" dirty="0">
+                <a:latin typeface="MS Shell Dlg 2" panose="020B0604030504040204" pitchFamily="34" charset="0"/>
+                <a:ea typeface="MS Shell Dlg 2" panose="020B0604030504040204" pitchFamily="34" charset="0"/>
+                <a:cs typeface="MS Shell Dlg 2" panose="020B0604030504040204" pitchFamily="34" charset="0"/>
+              </a:rPr>
+              <a:t>, </a:t>
+            </a:r>
+            <a:r>
+              <a:rPr lang="it-IT" sz="800" i="1" dirty="0" err="1">
+                <a:latin typeface="MS Shell Dlg 2" panose="020B0604030504040204" pitchFamily="34" charset="0"/>
+                <a:ea typeface="MS Shell Dlg 2" panose="020B0604030504040204" pitchFamily="34" charset="0"/>
+                <a:cs typeface="MS Shell Dlg 2" panose="020B0604030504040204" pitchFamily="34" charset="0"/>
+              </a:rPr>
+              <a:t>Pleuronectes</a:t>
+            </a:r>
+            <a:r>
+              <a:rPr lang="it-IT" sz="800" i="1" dirty="0">
+                <a:latin typeface="MS Shell Dlg 2" panose="020B0604030504040204" pitchFamily="34" charset="0"/>
+                <a:ea typeface="MS Shell Dlg 2" panose="020B0604030504040204" pitchFamily="34" charset="0"/>
+                <a:cs typeface="MS Shell Dlg 2" panose="020B0604030504040204" pitchFamily="34" charset="0"/>
+              </a:rPr>
+              <a:t> platessa</a:t>
             </a:r>
           </a:p>
         </p:txBody>
